--- a/drishti/poster/DRISHTI_Poster_ICSIGT2026_EcoGenesis.pptx
+++ b/drishti/poster/DRISHTI_Poster_ICSIGT2026_EcoGenesis.pptx
@@ -1,20 +1,20 @@
 
 <file path=ppt/presentation.xml><?xml version="1.0" encoding="utf-8"?>
-<p:presentation xmlns:a="http://schemas.openxmlformats.org/drawingml/2006/main" xmlns:r="http://schemas.openxmlformats.org/officeDocument/2006/relationships" xmlns:p="http://schemas.openxmlformats.org/presentationml/2006/main" strictFirstAndLastChars="0" saveSubsetFonts="1" autoCompressPictures="0">
+<p:presentation xmlns:a="http://schemas.openxmlformats.org/drawingml/2006/main" xmlns:r="http://schemas.openxmlformats.org/officeDocument/2006/relationships" xmlns:mc="http://schemas.openxmlformats.org/markup-compatibility/2006" xmlns:mv="urn:schemas-microsoft-com:mac:vml" xmlns:p="http://schemas.openxmlformats.org/presentationml/2006/main" xmlns:c="http://schemas.openxmlformats.org/drawingml/2006/chart" xmlns:dgm="http://schemas.openxmlformats.org/drawingml/2006/diagram" xmlns:o="urn:schemas-microsoft-com:office:office" xmlns:v="urn:schemas-microsoft-com:vml" xmlns:pvml="urn:schemas-microsoft-com:office:powerpoint" xmlns:com="http://schemas.openxmlformats.org/drawingml/2006/compatibility" xmlns:p14="http://schemas.microsoft.com/office/powerpoint/2010/main" xmlns:p15="http://schemas.microsoft.com/office/powerpoint/2012/main" xmlns:ahyp="http://schemas.microsoft.com/office/drawing/2018/hyperlinkcolor" autoCompressPictures="0" strictFirstAndLastChars="0" saveSubsetFonts="1">
   <p:sldMasterIdLst>
-    <p:sldMasterId id="2147483648" r:id="rId1"/>
+    <p:sldMasterId id="2147483648" r:id="rId4"/>
   </p:sldMasterIdLst>
   <p:sldIdLst>
-    <p:sldId id="256" r:id="rId2"/>
+    <p:sldId id="256" r:id="rId5"/>
   </p:sldIdLst>
-  <p:sldSz cx="32918400" cy="43891200"/>
+  <p:sldSz cy="43891200" cx="32918400"/>
   <p:notesSz cx="6858000" cy="9144000"/>
   <p:defaultTextStyle>
     <a:defPPr lvl="0">
       <a:defRPr lang="en-US"/>
     </a:defPPr>
-    <a:lvl1pPr marL="0" lvl="0" algn="l" defTabSz="457200" rtl="0" eaLnBrk="1" latinLnBrk="0" hangingPunct="1">
-      <a:defRPr sz="1800" kern="1200">
+    <a:lvl1pPr defTabSz="457200" eaLnBrk="1" hangingPunct="1" latinLnBrk="0" lvl="0" marL="0" rtl="0" algn="l">
+      <a:defRPr kern="1200" sz="1800">
         <a:solidFill>
           <a:schemeClr val="tx1"/>
         </a:solidFill>
@@ -23,8 +23,8 @@
         <a:cs typeface="+mn-cs"/>
       </a:defRPr>
     </a:lvl1pPr>
-    <a:lvl2pPr marL="457200" lvl="1" algn="l" defTabSz="457200" rtl="0" eaLnBrk="1" latinLnBrk="0" hangingPunct="1">
-      <a:defRPr sz="1800" kern="1200">
+    <a:lvl2pPr defTabSz="457200" eaLnBrk="1" hangingPunct="1" latinLnBrk="0" lvl="1" marL="457200" rtl="0" algn="l">
+      <a:defRPr kern="1200" sz="1800">
         <a:solidFill>
           <a:schemeClr val="tx1"/>
         </a:solidFill>
@@ -33,8 +33,8 @@
         <a:cs typeface="+mn-cs"/>
       </a:defRPr>
     </a:lvl2pPr>
-    <a:lvl3pPr marL="914400" lvl="2" algn="l" defTabSz="457200" rtl="0" eaLnBrk="1" latinLnBrk="0" hangingPunct="1">
-      <a:defRPr sz="1800" kern="1200">
+    <a:lvl3pPr defTabSz="457200" eaLnBrk="1" hangingPunct="1" latinLnBrk="0" lvl="2" marL="914400" rtl="0" algn="l">
+      <a:defRPr kern="1200" sz="1800">
         <a:solidFill>
           <a:schemeClr val="tx1"/>
         </a:solidFill>
@@ -43,8 +43,8 @@
         <a:cs typeface="+mn-cs"/>
       </a:defRPr>
     </a:lvl3pPr>
-    <a:lvl4pPr marL="1371600" lvl="3" algn="l" defTabSz="457200" rtl="0" eaLnBrk="1" latinLnBrk="0" hangingPunct="1">
-      <a:defRPr sz="1800" kern="1200">
+    <a:lvl4pPr defTabSz="457200" eaLnBrk="1" hangingPunct="1" latinLnBrk="0" lvl="3" marL="1371600" rtl="0" algn="l">
+      <a:defRPr kern="1200" sz="1800">
         <a:solidFill>
           <a:schemeClr val="tx1"/>
         </a:solidFill>
@@ -53,8 +53,8 @@
         <a:cs typeface="+mn-cs"/>
       </a:defRPr>
     </a:lvl4pPr>
-    <a:lvl5pPr marL="1828800" lvl="4" algn="l" defTabSz="457200" rtl="0" eaLnBrk="1" latinLnBrk="0" hangingPunct="1">
-      <a:defRPr sz="1800" kern="1200">
+    <a:lvl5pPr defTabSz="457200" eaLnBrk="1" hangingPunct="1" latinLnBrk="0" lvl="4" marL="1828800" rtl="0" algn="l">
+      <a:defRPr kern="1200" sz="1800">
         <a:solidFill>
           <a:schemeClr val="tx1"/>
         </a:solidFill>
@@ -63,8 +63,8 @@
         <a:cs typeface="+mn-cs"/>
       </a:defRPr>
     </a:lvl5pPr>
-    <a:lvl6pPr marL="2286000" lvl="5" algn="l" defTabSz="457200" rtl="0" eaLnBrk="1" latinLnBrk="0" hangingPunct="1">
-      <a:defRPr sz="1800" kern="1200">
+    <a:lvl6pPr defTabSz="457200" eaLnBrk="1" hangingPunct="1" latinLnBrk="0" lvl="5" marL="2286000" rtl="0" algn="l">
+      <a:defRPr kern="1200" sz="1800">
         <a:solidFill>
           <a:schemeClr val="tx1"/>
         </a:solidFill>
@@ -73,8 +73,8 @@
         <a:cs typeface="+mn-cs"/>
       </a:defRPr>
     </a:lvl6pPr>
-    <a:lvl7pPr marL="2743200" lvl="6" algn="l" defTabSz="457200" rtl="0" eaLnBrk="1" latinLnBrk="0" hangingPunct="1">
-      <a:defRPr sz="1800" kern="1200">
+    <a:lvl7pPr defTabSz="457200" eaLnBrk="1" hangingPunct="1" latinLnBrk="0" lvl="6" marL="2743200" rtl="0" algn="l">
+      <a:defRPr kern="1200" sz="1800">
         <a:solidFill>
           <a:schemeClr val="tx1"/>
         </a:solidFill>
@@ -83,8 +83,8 @@
         <a:cs typeface="+mn-cs"/>
       </a:defRPr>
     </a:lvl7pPr>
-    <a:lvl8pPr marL="3200400" lvl="7" algn="l" defTabSz="457200" rtl="0" eaLnBrk="1" latinLnBrk="0" hangingPunct="1">
-      <a:defRPr sz="1800" kern="1200">
+    <a:lvl8pPr defTabSz="457200" eaLnBrk="1" hangingPunct="1" latinLnBrk="0" lvl="7" marL="3200400" rtl="0" algn="l">
+      <a:defRPr kern="1200" sz="1800">
         <a:solidFill>
           <a:schemeClr val="tx1"/>
         </a:solidFill>
@@ -93,8 +93,8 @@
         <a:cs typeface="+mn-cs"/>
       </a:defRPr>
     </a:lvl8pPr>
-    <a:lvl9pPr marL="3657600" lvl="8" algn="l" defTabSz="457200" rtl="0" eaLnBrk="1" latinLnBrk="0" hangingPunct="1">
-      <a:defRPr sz="1800" kern="1200">
+    <a:lvl9pPr defTabSz="457200" eaLnBrk="1" hangingPunct="1" latinLnBrk="0" lvl="8" marL="3657600" rtl="0" algn="l">
+      <a:defRPr kern="1200" sz="1800">
         <a:solidFill>
           <a:schemeClr val="tx1"/>
         </a:solidFill>
@@ -106,7 +106,7 @@
   </p:defaultTextStyle>
   <p:extLst>
     <p:ext uri="{EFAFB233-063F-42B5-8137-9DF3F51BA10A}">
-      <p15:sldGuideLst xmlns:p15="http://schemas.microsoft.com/office/powerpoint/2012/main">
+      <p15:sldGuideLst>
         <p15:guide id="1" orient="horz" pos="2160">
           <p15:clr>
             <a:srgbClr val="A4A3A4"/>
@@ -121,6 +121,30 @@
     </p:ext>
   </p:extLst>
 </p:presentation>
+</file>
+
+<file path=ppt/presProps1.xml><?xml version="1.0" encoding="utf-8"?>
+<p:presentationPr xmlns:a="http://schemas.openxmlformats.org/drawingml/2006/main" xmlns:r="http://schemas.openxmlformats.org/officeDocument/2006/relationships" xmlns:mc="http://schemas.openxmlformats.org/markup-compatibility/2006" xmlns:mv="urn:schemas-microsoft-com:mac:vml" xmlns:p="http://schemas.openxmlformats.org/presentationml/2006/main" xmlns:c="http://schemas.openxmlformats.org/drawingml/2006/chart" xmlns:dgm="http://schemas.openxmlformats.org/drawingml/2006/diagram" xmlns:o="urn:schemas-microsoft-com:office:office" xmlns:v="urn:schemas-microsoft-com:vml" xmlns:pvml="urn:schemas-microsoft-com:office:powerpoint" xmlns:com="http://schemas.openxmlformats.org/drawingml/2006/compatibility" xmlns:p14="http://schemas.microsoft.com/office/powerpoint/2010/main" xmlns:p15="http://schemas.microsoft.com/office/powerpoint/2012/main" xmlns:ahyp="http://schemas.microsoft.com/office/drawing/2018/hyperlinkcolor"/>
+</file>
+
+<file path=ppt/viewProps1.xml><?xml version="1.0" encoding="utf-8"?>
+<p:viewPr xmlns:a="http://schemas.openxmlformats.org/drawingml/2006/main" xmlns:r="http://schemas.openxmlformats.org/officeDocument/2006/relationships" xmlns:mc="http://schemas.openxmlformats.org/markup-compatibility/2006" xmlns:mv="urn:schemas-microsoft-com:mac:vml" xmlns:p="http://schemas.openxmlformats.org/presentationml/2006/main" xmlns:c="http://schemas.openxmlformats.org/drawingml/2006/chart" xmlns:dgm="http://schemas.openxmlformats.org/drawingml/2006/diagram" xmlns:o="urn:schemas-microsoft-com:office:office" xmlns:v="urn:schemas-microsoft-com:vml" xmlns:pvml="urn:schemas-microsoft-com:office:powerpoint" xmlns:com="http://schemas.openxmlformats.org/drawingml/2006/compatibility" xmlns:p14="http://schemas.microsoft.com/office/powerpoint/2010/main" xmlns:p15="http://schemas.microsoft.com/office/powerpoint/2012/main" xmlns:ahyp="http://schemas.microsoft.com/office/drawing/2018/hyperlinkcolor" showComments="0">
+  <p:slideViewPr>
+    <p:cSldViewPr snapToGrid="0">
+      <p:cViewPr varScale="1">
+        <p:scale>
+          <a:sx n="100" d="100"/>
+          <a:sy n="100" d="100"/>
+        </p:scale>
+        <p:origin x="0" y="0"/>
+      </p:cViewPr>
+      <p:guideLst>
+        <p:guide pos="2160" orient="horz"/>
+        <p:guide pos="2880"/>
+      </p:guideLst>
+    </p:cSldViewPr>
+  </p:slideViewPr>
+</p:viewPr>
 </file>
 
 <file path=ppt/slideLayouts/slideLayout1.xml><?xml version="1.0" encoding="utf-8"?>
@@ -302,7 +326,7 @@
           <a:p>
             <a:fld id="{5BCAD085-E8A6-8845-BD4E-CB4CCA059FC4}" type="datetimeFigureOut">
               <a:rPr lang="en-US" smtClean="0"/>
-              <a:t>8/31/2026</a:t>
+              <a:t>8/30/26</a:t>
             </a:fld>
             <a:endParaRPr lang="en-US"/>
           </a:p>
@@ -470,7 +494,7 @@
           <a:p>
             <a:fld id="{5BCAD085-E8A6-8845-BD4E-CB4CCA059FC4}" type="datetimeFigureOut">
               <a:rPr lang="en-US" smtClean="0"/>
-              <a:t>8/31/2026</a:t>
+              <a:t>8/30/26</a:t>
             </a:fld>
             <a:endParaRPr lang="en-US"/>
           </a:p>
@@ -648,7 +672,7 @@
           <a:p>
             <a:fld id="{5BCAD085-E8A6-8845-BD4E-CB4CCA059FC4}" type="datetimeFigureOut">
               <a:rPr lang="en-US" smtClean="0"/>
-              <a:t>8/31/2026</a:t>
+              <a:t>8/30/26</a:t>
             </a:fld>
             <a:endParaRPr lang="en-US"/>
           </a:p>
@@ -816,7 +840,7 @@
           <a:p>
             <a:fld id="{5BCAD085-E8A6-8845-BD4E-CB4CCA059FC4}" type="datetimeFigureOut">
               <a:rPr lang="en-US" smtClean="0"/>
-              <a:t>8/31/2026</a:t>
+              <a:t>8/30/26</a:t>
             </a:fld>
             <a:endParaRPr lang="en-US"/>
           </a:p>
@@ -1061,7 +1085,7 @@
           <a:p>
             <a:fld id="{5BCAD085-E8A6-8845-BD4E-CB4CCA059FC4}" type="datetimeFigureOut">
               <a:rPr lang="en-US" smtClean="0"/>
-              <a:t>8/31/2026</a:t>
+              <a:t>8/30/26</a:t>
             </a:fld>
             <a:endParaRPr lang="en-US"/>
           </a:p>
@@ -1346,7 +1370,7 @@
           <a:p>
             <a:fld id="{5BCAD085-E8A6-8845-BD4E-CB4CCA059FC4}" type="datetimeFigureOut">
               <a:rPr lang="en-US" smtClean="0"/>
-              <a:t>8/31/2026</a:t>
+              <a:t>8/30/26</a:t>
             </a:fld>
             <a:endParaRPr lang="en-US"/>
           </a:p>
@@ -1765,7 +1789,7 @@
           <a:p>
             <a:fld id="{5BCAD085-E8A6-8845-BD4E-CB4CCA059FC4}" type="datetimeFigureOut">
               <a:rPr lang="en-US" smtClean="0"/>
-              <a:t>8/31/2026</a:t>
+              <a:t>8/30/26</a:t>
             </a:fld>
             <a:endParaRPr lang="en-US"/>
           </a:p>
@@ -1882,7 +1906,7 @@
           <a:p>
             <a:fld id="{5BCAD085-E8A6-8845-BD4E-CB4CCA059FC4}" type="datetimeFigureOut">
               <a:rPr lang="en-US" smtClean="0"/>
-              <a:t>8/31/2026</a:t>
+              <a:t>8/30/26</a:t>
             </a:fld>
             <a:endParaRPr lang="en-US"/>
           </a:p>
@@ -1977,7 +2001,7 @@
           <a:p>
             <a:fld id="{5BCAD085-E8A6-8845-BD4E-CB4CCA059FC4}" type="datetimeFigureOut">
               <a:rPr lang="en-US" smtClean="0"/>
-              <a:t>8/31/2026</a:t>
+              <a:t>8/30/26</a:t>
             </a:fld>
             <a:endParaRPr lang="en-US"/>
           </a:p>
@@ -2252,7 +2276,7 @@
           <a:p>
             <a:fld id="{5BCAD085-E8A6-8845-BD4E-CB4CCA059FC4}" type="datetimeFigureOut">
               <a:rPr lang="en-US" smtClean="0"/>
-              <a:t>8/31/2026</a:t>
+              <a:t>8/30/26</a:t>
             </a:fld>
             <a:endParaRPr lang="en-US"/>
           </a:p>
@@ -2504,7 +2528,7 @@
           <a:p>
             <a:fld id="{5BCAD085-E8A6-8845-BD4E-CB4CCA059FC4}" type="datetimeFigureOut">
               <a:rPr lang="en-US" smtClean="0"/>
-              <a:t>8/31/2026</a:t>
+              <a:t>8/30/26</a:t>
             </a:fld>
             <a:endParaRPr lang="en-US"/>
           </a:p>
@@ -2715,7 +2739,7 @@
           <a:p>
             <a:fld id="{5BCAD085-E8A6-8845-BD4E-CB4CCA059FC4}" type="datetimeFigureOut">
               <a:rPr lang="en-US" smtClean="0"/>
-              <a:t>8/31/2026</a:t>
+              <a:t>8/30/26</a:t>
             </a:fld>
             <a:endParaRPr lang="en-US"/>
           </a:p>
@@ -3278,8 +3302,8 @@
         </p:nvSpPr>
         <p:spPr>
           <a:xfrm>
-            <a:off x="4572000" y="4733688"/>
-            <a:ext cx="23774400" cy="764761"/>
+            <a:off x="4572000" y="4864608"/>
+            <a:ext cx="23774400" cy="502920"/>
           </a:xfrm>
           <a:prstGeom prst="rect">
             <a:avLst/>
@@ -3301,74 +3325,14 @@
               </a:spcAft>
             </a:pPr>
             <a:r>
-              <a:rPr sz="1800" b="1" dirty="0">
+              <a:rPr sz="1800" b="1">
                 <a:solidFill>
                   <a:srgbClr val="083070"/>
                 </a:solidFill>
                 <a:latin typeface="Arial"/>
               </a:rPr>
-              <a:t>Email: </a:t>
-            </a:r>
-            <a:r>
-              <a:rPr sz="1800" b="1" dirty="0">
-                <a:solidFill>
-                  <a:srgbClr val="083070"/>
-                </a:solidFill>
-                <a:latin typeface="Arial"/>
-                <a:hlinkClick r:id="rId2"/>
-              </a:rPr>
-              <a:t>g.vyas@op.iitg.ac.in</a:t>
-            </a:r>
-            <a:r>
-              <a:rPr lang="en-US" sz="1800" b="1" dirty="0">
-                <a:solidFill>
-                  <a:srgbClr val="083070"/>
-                </a:solidFill>
-                <a:latin typeface="Arial"/>
-              </a:rPr>
-              <a:t> ,</a:t>
-            </a:r>
-            <a:r>
-              <a:rPr lang="en-US" sz="1800" b="1" dirty="0">
-                <a:solidFill>
-                  <a:srgbClr val="083070"/>
-                </a:solidFill>
-                <a:latin typeface="Arial"/>
-                <a:hlinkClick r:id="rId3"/>
-              </a:rPr>
-              <a:t>s.mandavi@op.iitg.ac.in</a:t>
-            </a:r>
-            <a:endParaRPr lang="en-US" sz="1800" b="1" dirty="0">
-              <a:solidFill>
-                <a:srgbClr val="083070"/>
-              </a:solidFill>
-              <a:latin typeface="Arial"/>
-            </a:endParaRPr>
-          </a:p>
-          <a:p>
-            <a:pPr algn="ctr">
-              <a:lnSpc>
-                <a:spcPct val="112000"/>
-              </a:lnSpc>
-              <a:spcAft>
-                <a:spcPts val="600"/>
-              </a:spcAft>
-            </a:pPr>
-            <a:r>
-              <a:rPr lang="en-US" sz="1800" b="1" dirty="0">
-                <a:solidFill>
-                  <a:srgbClr val="083070"/>
-                </a:solidFill>
-                <a:latin typeface="Arial"/>
-              </a:rPr>
-              <a:t> </a:t>
-            </a:r>
-            <a:endParaRPr sz="1800" b="1" dirty="0">
-              <a:solidFill>
-                <a:srgbClr val="083070"/>
-              </a:solidFill>
-              <a:latin typeface="Arial"/>
-            </a:endParaRPr>
+              <a:t>g.vyas@op.iitg.ac.in   ·   s.mandavi@op.iitg.ac.in</a:t>
+            </a:r>
           </a:p>
         </p:txBody>
       </p:sp>
@@ -3624,12 +3588,15 @@
                 <a:spcPts val="1300"/>
               </a:spcAft>
             </a:pPr>
-            <a:endParaRPr sz="1950" b="1">
-              <a:solidFill>
-                <a:srgbClr val="083070"/>
-              </a:solidFill>
-              <a:latin typeface="Arial"/>
-            </a:endParaRPr>
+            <a:r>
+              <a:rPr sz="950" b="0">
+                <a:solidFill>
+                  <a:srgbClr val="6E6E6E"/>
+                </a:solidFill>
+                <a:latin typeface="Arial"/>
+              </a:rPr>
+              <a:t/>
+            </a:r>
           </a:p>
           <a:p>
             <a:pPr algn="l">
@@ -4149,7 +4116,15 @@
                 <a:spcPts val="600"/>
               </a:spcAft>
             </a:pPr>
-            <a:endParaRPr/>
+            <a:r>
+              <a:rPr sz="1200" b="0">
+                <a:solidFill>
+                  <a:srgbClr val="6E6E6E"/>
+                </a:solidFill>
+                <a:latin typeface="Arial"/>
+              </a:rPr>
+              <a:t/>
+            </a:r>
           </a:p>
         </p:txBody>
       </p:sp>
@@ -4574,7 +4549,15 @@
                 <a:spcPts val="600"/>
               </a:spcAft>
             </a:pPr>
-            <a:endParaRPr/>
+            <a:r>
+              <a:rPr sz="1200" b="0">
+                <a:solidFill>
+                  <a:srgbClr val="6E6E6E"/>
+                </a:solidFill>
+                <a:latin typeface="Arial"/>
+              </a:rPr>
+              <a:t/>
+            </a:r>
           </a:p>
         </p:txBody>
       </p:sp>
@@ -4735,7 +4718,15 @@
                 <a:spcPts val="600"/>
               </a:spcAft>
             </a:pPr>
-            <a:endParaRPr/>
+            <a:r>
+              <a:rPr sz="1200" b="0">
+                <a:solidFill>
+                  <a:srgbClr val="6E6E6E"/>
+                </a:solidFill>
+                <a:latin typeface="Arial"/>
+              </a:rPr>
+              <a:t/>
+            </a:r>
           </a:p>
         </p:txBody>
       </p:sp>
@@ -4896,7 +4887,15 @@
                 <a:spcPts val="600"/>
               </a:spcAft>
             </a:pPr>
-            <a:endParaRPr/>
+            <a:r>
+              <a:rPr sz="1200" b="0">
+                <a:solidFill>
+                  <a:srgbClr val="6E6E6E"/>
+                </a:solidFill>
+                <a:latin typeface="Arial"/>
+              </a:rPr>
+              <a:t/>
+            </a:r>
           </a:p>
         </p:txBody>
       </p:sp>
@@ -5103,7 +5102,15 @@
                 <a:spcPts val="600"/>
               </a:spcAft>
             </a:pPr>
-            <a:endParaRPr/>
+            <a:r>
+              <a:rPr sz="1200" b="0">
+                <a:solidFill>
+                  <a:srgbClr val="6E6E6E"/>
+                </a:solidFill>
+                <a:latin typeface="Arial"/>
+              </a:rPr>
+              <a:t/>
+            </a:r>
           </a:p>
         </p:txBody>
       </p:sp>
@@ -5225,7 +5232,15 @@
                 <a:spcPts val="600"/>
               </a:spcAft>
             </a:pPr>
-            <a:endParaRPr/>
+            <a:r>
+              <a:rPr sz="1200" b="0">
+                <a:solidFill>
+                  <a:srgbClr val="6E6E6E"/>
+                </a:solidFill>
+                <a:latin typeface="Arial"/>
+              </a:rPr>
+              <a:t/>
+            </a:r>
           </a:p>
         </p:txBody>
       </p:sp>
@@ -5347,7 +5362,15 @@
                 <a:spcPts val="600"/>
               </a:spcAft>
             </a:pPr>
-            <a:endParaRPr/>
+            <a:r>
+              <a:rPr sz="1200" b="0">
+                <a:solidFill>
+                  <a:srgbClr val="6E6E6E"/>
+                </a:solidFill>
+                <a:latin typeface="Arial"/>
+              </a:rPr>
+              <a:t/>
+            </a:r>
           </a:p>
         </p:txBody>
       </p:sp>
@@ -5972,13 +5995,13 @@
               </a:spcAft>
             </a:pPr>
             <a:r>
-              <a:rPr sz="1800" b="0">
+              <a:rPr sz="1700" b="0">
                 <a:solidFill>
                   <a:srgbClr val="6E6E6E"/>
                 </a:solidFill>
                 <a:latin typeface="Arial"/>
               </a:rPr>
-              <a:t>Submitted to the 1st International Conference on Sustainable Innovation and Green Technologies (ICSIGT 2026), AVINYA 2026 Eco-Innovate Challenge, organised by the Prakriti Club.</a:t>
+              <a:t>Submitted to ICSIGT 2026 · AVINYA 2026 Eco-Innovate Challenge, organised by the Prakriti Club, IIT Guwahati.</a:t>
             </a:r>
           </a:p>
           <a:p>
@@ -5990,12 +6013,15 @@
                 <a:spcPts val="600"/>
               </a:spcAft>
             </a:pPr>
-            <a:endParaRPr sz="1800" b="0">
-              <a:solidFill>
-                <a:srgbClr val="6E6E6E"/>
-              </a:solidFill>
-              <a:latin typeface="Arial"/>
-            </a:endParaRPr>
+            <a:r>
+              <a:rPr sz="1700" b="0">
+                <a:solidFill>
+                  <a:srgbClr val="6E6E6E"/>
+                </a:solidFill>
+                <a:latin typeface="Arial"/>
+              </a:rPr>
+              <a:t>We thank the OpenStreetMap contributors, Open-Meteo and the USGS for the open data this work rests on.</a:t>
+            </a:r>
           </a:p>
           <a:p>
             <a:pPr algn="l">
@@ -6007,48 +6033,13 @@
               </a:spcAft>
             </a:pPr>
             <a:r>
-              <a:rPr sz="1800" b="0">
-                <a:solidFill>
-                  <a:srgbClr val="6E6E6E"/>
+              <a:rPr sz="1800" b="1">
+                <a:solidFill>
+                  <a:srgbClr val="083070"/>
                 </a:solidFill>
                 <a:latin typeface="Arial"/>
               </a:rPr>
-              <a:t>We gratefully acknowledge the OpenStreetMap contributors, the Open-Meteo project and the United States Geological Survey for providing the open data that makes a zero-cost humanitarian system possible.</a:t>
-            </a:r>
-          </a:p>
-          <a:p>
-            <a:pPr algn="l">
-              <a:lnSpc>
-                <a:spcPct val="112000"/>
-              </a:lnSpc>
-              <a:spcAft>
-                <a:spcPts val="600"/>
-              </a:spcAft>
-            </a:pPr>
-            <a:endParaRPr sz="1800" b="0">
-              <a:solidFill>
-                <a:srgbClr val="6E6E6E"/>
-              </a:solidFill>
-              <a:latin typeface="Arial"/>
-            </a:endParaRPr>
-          </a:p>
-          <a:p>
-            <a:pPr algn="l">
-              <a:lnSpc>
-                <a:spcPct val="112000"/>
-              </a:lnSpc>
-              <a:spcAft>
-                <a:spcPts val="600"/>
-              </a:spcAft>
-            </a:pPr>
-            <a:r>
-              <a:rPr sz="2000" b="1">
-                <a:solidFill>
-                  <a:srgbClr val="083070"/>
-                </a:solidFill>
-                <a:latin typeface="Arial"/>
-              </a:rPr>
-              <a:t>Team EcoGenesis</a:t>
+              <a:t>Team EcoGenesis  ·  MIT Licence</a:t>
             </a:r>
           </a:p>
         </p:txBody>
@@ -6351,7 +6342,7 @@
           <p:nvPr/>
         </p:nvPicPr>
         <p:blipFill>
-          <a:blip r:embed="rId4"/>
+          <a:blip r:embed="rId2"/>
           <a:stretch>
             <a:fillRect/>
           </a:stretch>
@@ -6381,7 +6372,7 @@
           <p:nvPr/>
         </p:nvPicPr>
         <p:blipFill>
-          <a:blip r:embed="rId5"/>
+          <a:blip r:embed="rId3"/>
           <a:stretch>
             <a:fillRect/>
           </a:stretch>
@@ -6513,7 +6504,7 @@
           <p:nvPr/>
         </p:nvPicPr>
         <p:blipFill>
-          <a:blip r:embed="rId6"/>
+          <a:blip r:embed="rId4"/>
           <a:stretch>
             <a:fillRect/>
           </a:stretch>
@@ -6537,7 +6528,7 @@
           <p:nvPr/>
         </p:nvPicPr>
         <p:blipFill>
-          <a:blip r:embed="rId7"/>
+          <a:blip r:embed="rId5"/>
           <a:stretch>
             <a:fillRect/>
           </a:stretch>
@@ -6561,7 +6552,7 @@
           <p:nvPr/>
         </p:nvPicPr>
         <p:blipFill>
-          <a:blip r:embed="rId8"/>
+          <a:blip r:embed="rId6"/>
           <a:stretch>
             <a:fillRect/>
           </a:stretch>
@@ -6585,7 +6576,7 @@
           <p:nvPr/>
         </p:nvPicPr>
         <p:blipFill>
-          <a:blip r:embed="rId9"/>
+          <a:blip r:embed="rId7"/>
           <a:stretch>
             <a:fillRect/>
           </a:stretch>
@@ -6609,7 +6600,7 @@
           <p:nvPr/>
         </p:nvPicPr>
         <p:blipFill>
-          <a:blip r:embed="rId10"/>
+          <a:blip r:embed="rId8"/>
           <a:stretch>
             <a:fillRect/>
           </a:stretch>
@@ -6633,7 +6624,7 @@
           <p:nvPr/>
         </p:nvPicPr>
         <p:blipFill>
-          <a:blip r:embed="rId11"/>
+          <a:blip r:embed="rId9"/>
           <a:stretch>
             <a:fillRect/>
           </a:stretch>
@@ -6657,7 +6648,7 @@
           <p:nvPr/>
         </p:nvPicPr>
         <p:blipFill>
-          <a:blip r:embed="rId12"/>
+          <a:blip r:embed="rId10"/>
           <a:stretch>
             <a:fillRect/>
           </a:stretch>
@@ -6681,7 +6672,7 @@
           <p:nvPr/>
         </p:nvPicPr>
         <p:blipFill>
-          <a:blip r:embed="rId13"/>
+          <a:blip r:embed="rId11"/>
           <a:stretch>
             <a:fillRect/>
           </a:stretch>
@@ -6705,6 +6696,54 @@
           <p:nvPr/>
         </p:nvPicPr>
         <p:blipFill>
+          <a:blip r:embed="rId12"/>
+          <a:stretch>
+            <a:fillRect/>
+          </a:stretch>
+        </p:blipFill>
+        <p:spPr>
+          <a:xfrm>
+            <a:off x="19880833" y="30961584"/>
+            <a:ext cx="12240261" cy="4818887"/>
+          </a:xfrm>
+          <a:prstGeom prst="rect">
+            <a:avLst/>
+          </a:prstGeom>
+        </p:spPr>
+      </p:pic>
+      <p:pic>
+        <p:nvPicPr>
+          <p:cNvPr id="79" name="Picture 78" descr="qr_demo.png"/>
+          <p:cNvPicPr>
+            <a:picLocks noChangeAspect="1"/>
+          </p:cNvPicPr>
+          <p:nvPr/>
+        </p:nvPicPr>
+        <p:blipFill>
+          <a:blip r:embed="rId13"/>
+          <a:stretch>
+            <a:fillRect/>
+          </a:stretch>
+        </p:blipFill>
+        <p:spPr>
+          <a:xfrm>
+            <a:off x="19376136" y="41074848"/>
+            <a:ext cx="1572768" cy="1572768"/>
+          </a:xfrm>
+          <a:prstGeom prst="rect">
+            <a:avLst/>
+          </a:prstGeom>
+        </p:spPr>
+      </p:pic>
+      <p:pic>
+        <p:nvPicPr>
+          <p:cNvPr id="80" name="Picture 79" descr="qr_repo.png"/>
+          <p:cNvPicPr>
+            <a:picLocks noChangeAspect="1"/>
+          </p:cNvPicPr>
+          <p:nvPr/>
+        </p:nvPicPr>
+        <p:blipFill>
           <a:blip r:embed="rId14"/>
           <a:stretch>
             <a:fillRect/>
@@ -6712,14 +6751,138 @@
         </p:blipFill>
         <p:spPr>
           <a:xfrm>
-            <a:off x="19880833" y="30961584"/>
-            <a:ext cx="12240261" cy="4818887"/>
+            <a:off x="21817584" y="41074848"/>
+            <a:ext cx="1572768" cy="1572768"/>
           </a:xfrm>
           <a:prstGeom prst="rect">
             <a:avLst/>
           </a:prstGeom>
         </p:spPr>
       </p:pic>
+      <p:sp>
+        <p:nvSpPr>
+          <p:cNvPr id="81" name="TextBox 80"/>
+          <p:cNvSpPr txBox="1"/>
+          <p:nvPr/>
+        </p:nvSpPr>
+        <p:spPr>
+          <a:xfrm>
+            <a:off x="18836640" y="42739056"/>
+            <a:ext cx="2651760" cy="868680"/>
+          </a:xfrm>
+          <a:prstGeom prst="rect">
+            <a:avLst/>
+          </a:prstGeom>
+          <a:noFill/>
+        </p:spPr>
+        <p:txBody>
+          <a:bodyPr wrap="square" anchor="t">
+            <a:spAutoFit/>
+          </a:bodyPr>
+          <a:lstStyle/>
+          <a:p>
+            <a:pPr algn="ctr">
+              <a:lnSpc>
+                <a:spcPct val="112000"/>
+              </a:lnSpc>
+              <a:spcAft>
+                <a:spcPts val="600"/>
+              </a:spcAft>
+            </a:pPr>
+            <a:r>
+              <a:rPr sz="1400" b="1">
+                <a:solidFill>
+                  <a:srgbClr val="00B050"/>
+                </a:solidFill>
+                <a:latin typeface="Arial"/>
+              </a:rPr>
+              <a:t>LIVE DASHBOARD</a:t>
+            </a:r>
+          </a:p>
+          <a:p>
+            <a:pPr algn="ctr">
+              <a:lnSpc>
+                <a:spcPct val="112000"/>
+              </a:lnSpc>
+              <a:spcAft>
+                <a:spcPts val="600"/>
+              </a:spcAft>
+            </a:pPr>
+            <a:r>
+              <a:rPr sz="1000" b="0">
+                <a:solidFill>
+                  <a:srgbClr val="6E6E6E"/>
+                </a:solidFill>
+                <a:latin typeface="Arial"/>
+              </a:rPr>
+              <a:t>realgauravvyas.github.io
+/drishti</a:t>
+            </a:r>
+          </a:p>
+        </p:txBody>
+      </p:sp>
+      <p:sp>
+        <p:nvSpPr>
+          <p:cNvPr id="82" name="TextBox 81"/>
+          <p:cNvSpPr txBox="1"/>
+          <p:nvPr/>
+        </p:nvSpPr>
+        <p:spPr>
+          <a:xfrm>
+            <a:off x="21278088" y="42739056"/>
+            <a:ext cx="2651760" cy="868680"/>
+          </a:xfrm>
+          <a:prstGeom prst="rect">
+            <a:avLst/>
+          </a:prstGeom>
+          <a:noFill/>
+        </p:spPr>
+        <p:txBody>
+          <a:bodyPr wrap="square" anchor="t">
+            <a:spAutoFit/>
+          </a:bodyPr>
+          <a:lstStyle/>
+          <a:p>
+            <a:pPr algn="ctr">
+              <a:lnSpc>
+                <a:spcPct val="112000"/>
+              </a:lnSpc>
+              <a:spcAft>
+                <a:spcPts val="600"/>
+              </a:spcAft>
+            </a:pPr>
+            <a:r>
+              <a:rPr sz="1400" b="1">
+                <a:solidFill>
+                  <a:srgbClr val="083070"/>
+                </a:solidFill>
+                <a:latin typeface="Arial"/>
+              </a:rPr>
+              <a:t>SOURCE CODE</a:t>
+            </a:r>
+          </a:p>
+          <a:p>
+            <a:pPr algn="ctr">
+              <a:lnSpc>
+                <a:spcPct val="112000"/>
+              </a:lnSpc>
+              <a:spcAft>
+                <a:spcPts val="600"/>
+              </a:spcAft>
+            </a:pPr>
+            <a:r>
+              <a:rPr sz="1000" b="0">
+                <a:solidFill>
+                  <a:srgbClr val="6E6E6E"/>
+                </a:solidFill>
+                <a:latin typeface="Arial"/>
+              </a:rPr>
+              <a:t>github.com/realgauravvyas
+/drishti</a:t>
+            </a:r>
+          </a:p>
+        </p:txBody>
+      </p:sp>
     </p:spTree>
   </p:cSld>
   <p:clrMapOvr>

--- a/drishti/poster/DRISHTI_Poster_ICSIGT2026_EcoGenesis.pptx
+++ b/drishti/poster/DRISHTI_Poster_ICSIGT2026_EcoGenesis.pptx
@@ -6631,8 +6631,8 @@
         </p:blipFill>
         <p:spPr>
           <a:xfrm>
-            <a:off x="15553521" y="23143464"/>
-            <a:ext cx="7782388" cy="6281928"/>
+            <a:off x="15334488" y="23419585"/>
+            <a:ext cx="8220456" cy="5729685"/>
           </a:xfrm>
           <a:prstGeom prst="rect">
             <a:avLst/>
